--- a/dist/초5/영어/이해와읽기/초5_영어_이해와읽기_02_세부정보찾기_학생용.pptx
+++ b/dist/초5/영어/이해와읽기/초5_영어_이해와읽기_02_세부정보찾기_학생용.pptx
@@ -119,45 +119,45 @@
   <p:extLst>
     <p:ext uri="{521415D9-36F7-43E2-AB2F-B90AF26B5E84}">
       <p14:sectionLst xmlns:p14="http://schemas.microsoft.com/office/powerpoint/2010/main">
-        <p14:section name="도입" id="{9ffb2751-a891-3109-7cc3-7b04d314fd86}">
+        <p14:section name="도입" id="{b33b4255-8626-9427-4e24-2249d86e60aa}">
           <p14:sldIdLst>
             <p14:sldId id="256"/>
             <p14:sldId id="257"/>
           </p14:sldIdLst>
         </p14:section>
-        <p14:section name="개념" id="{bb5e59a5-c775-ae4d-f765-1133c0b20ba5}">
+        <p14:section name="개념" id="{25bd31c6-bc96-3092-0977-d0d036a302af}">
           <p14:sldIdLst>
             <p14:sldId id="258"/>
             <p14:sldId id="259"/>
             <p14:sldId id="262"/>
           </p14:sldIdLst>
         </p14:section>
-        <p14:section name="연습" id="{7e274328-1aef-47bd-d1d6-5dc84ee450d7}">
+        <p14:section name="연습" id="{f7425220-1a26-c379-77ce-87cb264e1cd7}">
           <p14:sldIdLst>
             <p14:sldId id="260"/>
             <p14:sldId id="261"/>
             <p14:sldId id="263"/>
           </p14:sldIdLst>
         </p14:section>
-        <p14:section name="개념" id="{725a6ada-5498-cf2a-a7b6-bb20880a0a00}">
+        <p14:section name="개념" id="{f1393c0f-2423-bd3a-ef0a-1fff72010039}">
           <p14:sldIdLst/>
         </p14:section>
-        <p14:section name="연습" id="{627fb094-1489-6835-4a13-97e54a8578d2}">
+        <p14:section name="연습" id="{6bd02456-d753-c1f1-ff98-97b480b6a45b}">
           <p14:sldIdLst/>
         </p14:section>
-        <p14:section name="확인" id="{8b0a3d34-17c2-dbe2-e9cd-7f052b52dbe0}">
+        <p14:section name="확인" id="{577f7db9-2849-1acb-d72e-363bdab8bf37}">
           <p14:sldIdLst>
             <p14:sldId id="264"/>
             <p14:sldId id="265"/>
             <p14:sldId id="266"/>
           </p14:sldIdLst>
         </p14:section>
-        <p14:section name="정리" id="{b5a20e67-7408-d85b-b1bc-18a194ad349e}">
+        <p14:section name="정리" id="{99c2202e-e278-b646-7616-4502cb48a3ec}">
           <p14:sldIdLst>
             <p14:sldId id="267"/>
           </p14:sldIdLst>
         </p14:section>
-        <p14:section name="보충" id="{9193ad5d-9499-2948-0b15-854bfc046254}">
+        <p14:section name="보충" id="{85841fcf-ab9d-f924-a3d9-e489e07e02c4}">
           <p14:sldIdLst>
             <p14:sldId id="268"/>
           </p14:sldIdLst>
